--- a/docs/mobile_histogram_defense.pptx
+++ b/docs/mobile_histogram_defense.pptx
@@ -19036,7 +19036,7 @@
                   <a:srgbClr val="7DF9C4"/>
                 </a:solidFill>
               </a:rPr>
-              <a:t>讲法：增强结果展示，不改变核心算法。</a:t>
+              <a:t>增强结果展示，不改变核心算法。</a:t>
             </a:r>
             <a:endParaRPr lang="en-US" sz="1450" dirty="0"/>
           </a:p>
